--- a/skills/beautiful-slides/charts/kpi/example-editorial-magazine.pptx
+++ b/skills/beautiful-slides/charts/kpi/example-editorial-magazine.pptx
@@ -3148,6 +3148,49 @@
           <a:solidFill>
             <a:srgbClr val="F6F1E8"/>
           </a:solidFill>
+          <a:ln>
+            <a:noFill/>
+          </a:ln>
+        </p:spPr>
+        <p:style>
+          <a:lnRef idx="1">
+            <a:schemeClr val="accent1"/>
+          </a:lnRef>
+          <a:fillRef idx="3">
+            <a:schemeClr val="accent1"/>
+          </a:fillRef>
+          <a:effectRef idx="2">
+            <a:schemeClr val="accent1"/>
+          </a:effectRef>
+          <a:fontRef idx="minor">
+            <a:schemeClr val="lt1"/>
+          </a:fontRef>
+        </p:style>
+        <p:txBody>
+          <a:bodyPr rtlCol="0" anchor="ctr"/>
+          <a:lstStyle/>
+          <a:p>
+            <a:pPr algn="ctr"/>
+          </a:p>
+        </p:txBody>
+      </p:sp>
+      <p:sp>
+        <p:nvSpPr>
+          <p:cNvPr id="4" name="Rectangle 3"/>
+          <p:cNvSpPr/>
+          <p:nvPr/>
+        </p:nvSpPr>
+        <p:spPr>
+          <a:xfrm>
+            <a:off x="731501" y="1508760"/>
+            <a:ext cx="3332397" cy="3291840"/>
+          </a:xfrm>
+          <a:prstGeom prst="rect">
+            <a:avLst/>
+          </a:prstGeom>
+          <a:solidFill>
+            <a:srgbClr val="F6F1E8"/>
+          </a:solidFill>
           <a:ln w="6350">
             <a:solidFill>
               <a:srgbClr val="6F675F"/>
@@ -3179,7 +3222,7 @@
       </p:sp>
       <p:sp>
         <p:nvSpPr>
-          <p:cNvPr id="4" name="TextBox 3"/>
+          <p:cNvPr id="5" name="TextBox 4"/>
           <p:cNvSpPr txBox="1"/>
           <p:nvPr/>
         </p:nvSpPr>
@@ -3203,7 +3246,7 @@
             <a:r>
               <a:rPr sz="1200" b="1">
                 <a:solidFill>
-                  <a:srgbClr val="6F675F"/>
+                  <a:srgbClr val="181514"/>
                 </a:solidFill>
                 <a:latin typeface="Newsreader"/>
               </a:rPr>
@@ -3214,7 +3257,7 @@
       </p:sp>
       <p:sp>
         <p:nvSpPr>
-          <p:cNvPr id="5" name="TextBox 4"/>
+          <p:cNvPr id="6" name="TextBox 5"/>
           <p:cNvSpPr txBox="1"/>
           <p:nvPr/>
         </p:nvSpPr>
@@ -3249,14 +3292,14 @@
       </p:sp>
       <p:sp>
         <p:nvSpPr>
-          <p:cNvPr id="6" name="TextBox 5"/>
+          <p:cNvPr id="7" name="TextBox 6"/>
           <p:cNvSpPr txBox="1"/>
           <p:nvPr/>
         </p:nvSpPr>
         <p:spPr>
           <a:xfrm>
             <a:off x="964768" y="3024225"/>
-            <a:ext cx="2865863" cy="285750"/>
+            <a:ext cx="2865863" cy="266700"/>
           </a:xfrm>
           <a:prstGeom prst="rect">
             <a:avLst/>
@@ -3271,7 +3314,7 @@
           <a:p>
             <a:pPr algn="l"/>
             <a:r>
-              <a:rPr sz="1500" b="0">
+              <a:rPr sz="1400" b="0">
                 <a:solidFill>
                   <a:srgbClr val="9C5B00"/>
                 </a:solidFill>
@@ -3284,7 +3327,7 @@
       </p:sp>
       <p:sp>
         <p:nvSpPr>
-          <p:cNvPr id="7" name="TextBox 6"/>
+          <p:cNvPr id="8" name="TextBox 7"/>
           <p:cNvSpPr txBox="1"/>
           <p:nvPr/>
         </p:nvSpPr>
@@ -3308,7 +3351,7 @@
             <a:r>
               <a:rPr sz="1100" b="0">
                 <a:solidFill>
-                  <a:srgbClr val="6F675F"/>
+                  <a:srgbClr val="181514"/>
                 </a:solidFill>
                 <a:latin typeface="Newsreader"/>
               </a:rPr>
@@ -3319,7 +3362,50 @@
       </p:sp>
       <p:sp>
         <p:nvSpPr>
-          <p:cNvPr id="8" name="Rectangle 7"/>
+          <p:cNvPr id="9" name="Rectangle 8"/>
+          <p:cNvSpPr/>
+          <p:nvPr/>
+        </p:nvSpPr>
+        <p:spPr>
+          <a:xfrm>
+            <a:off x="4429648" y="1508760"/>
+            <a:ext cx="3332397" cy="3291840"/>
+          </a:xfrm>
+          <a:prstGeom prst="rect">
+            <a:avLst/>
+          </a:prstGeom>
+          <a:solidFill>
+            <a:srgbClr val="F6F1E8"/>
+          </a:solidFill>
+          <a:ln>
+            <a:noFill/>
+          </a:ln>
+        </p:spPr>
+        <p:style>
+          <a:lnRef idx="1">
+            <a:schemeClr val="accent1"/>
+          </a:lnRef>
+          <a:fillRef idx="3">
+            <a:schemeClr val="accent1"/>
+          </a:fillRef>
+          <a:effectRef idx="2">
+            <a:schemeClr val="accent1"/>
+          </a:effectRef>
+          <a:fontRef idx="minor">
+            <a:schemeClr val="lt1"/>
+          </a:fontRef>
+        </p:style>
+        <p:txBody>
+          <a:bodyPr rtlCol="0" anchor="ctr"/>
+          <a:lstStyle/>
+          <a:p>
+            <a:pPr algn="ctr"/>
+          </a:p>
+        </p:txBody>
+      </p:sp>
+      <p:sp>
+        <p:nvSpPr>
+          <p:cNvPr id="10" name="Rectangle 9"/>
           <p:cNvSpPr/>
           <p:nvPr/>
         </p:nvSpPr>
@@ -3365,7 +3451,7 @@
       </p:sp>
       <p:sp>
         <p:nvSpPr>
-          <p:cNvPr id="9" name="TextBox 8"/>
+          <p:cNvPr id="11" name="TextBox 10"/>
           <p:cNvSpPr txBox="1"/>
           <p:nvPr/>
         </p:nvSpPr>
@@ -3389,7 +3475,7 @@
             <a:r>
               <a:rPr sz="1200" b="1">
                 <a:solidFill>
-                  <a:srgbClr val="6F675F"/>
+                  <a:srgbClr val="181514"/>
                 </a:solidFill>
                 <a:latin typeface="Newsreader"/>
               </a:rPr>
@@ -3400,7 +3486,7 @@
       </p:sp>
       <p:sp>
         <p:nvSpPr>
-          <p:cNvPr id="10" name="TextBox 9"/>
+          <p:cNvPr id="12" name="TextBox 11"/>
           <p:cNvSpPr txBox="1"/>
           <p:nvPr/>
         </p:nvSpPr>
@@ -3435,7 +3521,7 @@
       </p:sp>
       <p:sp>
         <p:nvSpPr>
-          <p:cNvPr id="11" name="TextBox 10"/>
+          <p:cNvPr id="13" name="TextBox 12"/>
           <p:cNvSpPr txBox="1"/>
           <p:nvPr/>
         </p:nvSpPr>
@@ -3470,7 +3556,7 @@
       </p:sp>
       <p:sp>
         <p:nvSpPr>
-          <p:cNvPr id="12" name="TextBox 11"/>
+          <p:cNvPr id="14" name="TextBox 13"/>
           <p:cNvSpPr txBox="1"/>
           <p:nvPr/>
         </p:nvSpPr>
@@ -3494,7 +3580,7 @@
             <a:r>
               <a:rPr sz="1100" b="0">
                 <a:solidFill>
-                  <a:srgbClr val="6F675F"/>
+                  <a:srgbClr val="181514"/>
                 </a:solidFill>
                 <a:latin typeface="Newsreader"/>
               </a:rPr>
@@ -3505,7 +3591,50 @@
       </p:sp>
       <p:sp>
         <p:nvSpPr>
-          <p:cNvPr id="13" name="Rectangle 12"/>
+          <p:cNvPr id="15" name="Rectangle 14"/>
+          <p:cNvSpPr/>
+          <p:nvPr/>
+        </p:nvSpPr>
+        <p:spPr>
+          <a:xfrm>
+            <a:off x="8127795" y="1508760"/>
+            <a:ext cx="3332397" cy="3291840"/>
+          </a:xfrm>
+          <a:prstGeom prst="rect">
+            <a:avLst/>
+          </a:prstGeom>
+          <a:solidFill>
+            <a:srgbClr val="F6F1E8"/>
+          </a:solidFill>
+          <a:ln>
+            <a:noFill/>
+          </a:ln>
+        </p:spPr>
+        <p:style>
+          <a:lnRef idx="1">
+            <a:schemeClr val="accent1"/>
+          </a:lnRef>
+          <a:fillRef idx="3">
+            <a:schemeClr val="accent1"/>
+          </a:fillRef>
+          <a:effectRef idx="2">
+            <a:schemeClr val="accent1"/>
+          </a:effectRef>
+          <a:fontRef idx="minor">
+            <a:schemeClr val="lt1"/>
+          </a:fontRef>
+        </p:style>
+        <p:txBody>
+          <a:bodyPr rtlCol="0" anchor="ctr"/>
+          <a:lstStyle/>
+          <a:p>
+            <a:pPr algn="ctr"/>
+          </a:p>
+        </p:txBody>
+      </p:sp>
+      <p:sp>
+        <p:nvSpPr>
+          <p:cNvPr id="16" name="Rectangle 15"/>
           <p:cNvSpPr/>
           <p:nvPr/>
         </p:nvSpPr>
@@ -3551,7 +3680,7 @@
       </p:sp>
       <p:sp>
         <p:nvSpPr>
-          <p:cNvPr id="14" name="TextBox 13"/>
+          <p:cNvPr id="17" name="TextBox 16"/>
           <p:cNvSpPr txBox="1"/>
           <p:nvPr/>
         </p:nvSpPr>
@@ -3575,7 +3704,7 @@
             <a:r>
               <a:rPr sz="1200" b="1">
                 <a:solidFill>
-                  <a:srgbClr val="6F675F"/>
+                  <a:srgbClr val="181514"/>
                 </a:solidFill>
                 <a:latin typeface="Newsreader"/>
               </a:rPr>
@@ -3586,7 +3715,7 @@
       </p:sp>
       <p:sp>
         <p:nvSpPr>
-          <p:cNvPr id="15" name="TextBox 14"/>
+          <p:cNvPr id="18" name="TextBox 17"/>
           <p:cNvSpPr txBox="1"/>
           <p:nvPr/>
         </p:nvSpPr>
@@ -3621,7 +3750,7 @@
       </p:sp>
       <p:sp>
         <p:nvSpPr>
-          <p:cNvPr id="16" name="TextBox 15"/>
+          <p:cNvPr id="19" name="TextBox 18"/>
           <p:cNvSpPr txBox="1"/>
           <p:nvPr/>
         </p:nvSpPr>
@@ -3656,7 +3785,7 @@
       </p:sp>
       <p:sp>
         <p:nvSpPr>
-          <p:cNvPr id="17" name="TextBox 16"/>
+          <p:cNvPr id="20" name="TextBox 19"/>
           <p:cNvSpPr txBox="1"/>
           <p:nvPr/>
         </p:nvSpPr>
@@ -3680,7 +3809,7 @@
             <a:r>
               <a:rPr sz="1100" b="0">
                 <a:solidFill>
-                  <a:srgbClr val="6F675F"/>
+                  <a:srgbClr val="181514"/>
                 </a:solidFill>
                 <a:latin typeface="Newsreader"/>
               </a:rPr>
